--- a/presentation/BRSET_to_mBRSET_Part2.pptx
+++ b/presentation/BRSET_to_mBRSET_Part2.pptx
@@ -5930,7 +5930,7 @@
                 </a:solidFill>
                 <a:latin typeface="Times New Roman"/>
               </a:rPr>
-              <a:t>Diabetic retinopathy, diseased-class F1 on mBRSET. Every value measured, none assumed.</a:t>
+              <a:t>Diabetic retinopathy, diseased-class F1 on mBRSET. Seven models measured, none assumed.</a:t>
             </a:r>
           </a:p>
         </p:txBody>
@@ -5987,8 +5987,8 @@
         </p:nvSpPr>
         <p:spPr>
           <a:xfrm>
-            <a:off x="1188720" y="2697480"/>
-            <a:ext cx="1734472" cy="566928"/>
+            <a:off x="1188720" y="2606040"/>
+            <a:ext cx="1605992" cy="548640"/>
           </a:xfrm>
           <a:prstGeom prst="rect">
             <a:avLst/>
@@ -6022,7 +6022,7 @@
           <a:lstStyle/>
           <a:p>
             <a:pPr algn="ctr">
-              <a:defRPr sz="1500" b="1">
+              <a:defRPr sz="1400" b="1">
                 <a:solidFill>
                   <a:srgbClr val="1A1A1A"/>
                 </a:solidFill>
@@ -6030,7 +6030,7 @@
               </a:defRPr>
             </a:pPr>
             <a:r>
-              <a:rPr sz="1500" b="1">
+              <a:rPr sz="1400" b="1">
                 <a:solidFill>
                   <a:srgbClr val="1A1A1A"/>
                 </a:solidFill>
@@ -6049,8 +6049,8 @@
         </p:nvSpPr>
         <p:spPr>
           <a:xfrm>
-            <a:off x="1188720" y="3374136"/>
-            <a:ext cx="1734472" cy="566928"/>
+            <a:off x="1188720" y="3246120"/>
+            <a:ext cx="1605992" cy="292608"/>
           </a:xfrm>
           <a:prstGeom prst="rect">
             <a:avLst/>
@@ -6078,17 +6078,7 @@
                 </a:solidFill>
                 <a:latin typeface="Times New Roman"/>
               </a:rPr>
-              <a:t>all that a better</a:t>
-            </a:r>
-            <a:br/>
-            <a:r>
-              <a:rPr sz="1100" b="0">
-                <a:solidFill>
-                  <a:srgbClr val="1A1A1A"/>
-                </a:solidFill>
-                <a:latin typeface="Times New Roman"/>
-              </a:rPr>
-              <a:t>cutoff can give</a:t>
+              <a:t>all a better cutoff can give</a:t>
             </a:r>
           </a:p>
         </p:txBody>
@@ -6101,8 +6091,8 @@
         </p:nvSpPr>
         <p:spPr>
           <a:xfrm>
-            <a:off x="2923192" y="2697480"/>
-            <a:ext cx="7958167" cy="566928"/>
+            <a:off x="2794712" y="2606040"/>
+            <a:ext cx="8086647" cy="548640"/>
           </a:xfrm>
           <a:prstGeom prst="rect">
             <a:avLst/>
@@ -6136,7 +6126,7 @@
           <a:lstStyle/>
           <a:p>
             <a:pPr algn="ctr">
-              <a:defRPr sz="1500" b="1">
+              <a:defRPr sz="1400" b="1">
                 <a:solidFill>
                   <a:srgbClr val="FFFFFF"/>
                 </a:solidFill>
@@ -6144,13 +6134,13 @@
               </a:defRPr>
             </a:pPr>
             <a:r>
-              <a:rPr sz="1500" b="1">
+              <a:rPr sz="1400" b="1">
                 <a:solidFill>
                   <a:srgbClr val="FFFFFF"/>
                 </a:solidFill>
                 <a:latin typeface="Times New Roman"/>
               </a:rPr>
-              <a:t>+0.039</a:t>
+              <a:t>+0.043</a:t>
             </a:r>
           </a:p>
         </p:txBody>
@@ -6163,8 +6153,8 @@
         </p:nvSpPr>
         <p:spPr>
           <a:xfrm>
-            <a:off x="2923192" y="3374136"/>
-            <a:ext cx="7958167" cy="566928"/>
+            <a:off x="2794712" y="3246120"/>
+            <a:ext cx="8086647" cy="292608"/>
           </a:xfrm>
           <a:prstGeom prst="rect">
             <a:avLst/>
@@ -6192,17 +6182,7 @@
                 </a:solidFill>
                 <a:latin typeface="Times New Roman"/>
               </a:rPr>
-              <a:t>needs a better model.</a:t>
-            </a:r>
-            <a:br/>
-            <a:r>
-              <a:rPr sz="1100" b="0">
-                <a:solidFill>
-                  <a:srgbClr val="1A1A1A"/>
-                </a:solidFill>
-                <a:latin typeface="Times New Roman"/>
-              </a:rPr>
-              <a:t>No cutoff reaches it</a:t>
+              <a:t>needs a better model</a:t>
             </a:r>
           </a:p>
         </p:txBody>
@@ -6215,8 +6195,8 @@
         </p:nvSpPr>
         <p:spPr>
           <a:xfrm>
-            <a:off x="365760" y="1554480"/>
-            <a:ext cx="1645920" cy="548640"/>
+            <a:off x="365760" y="1517904"/>
+            <a:ext cx="1645920" cy="530352"/>
           </a:xfrm>
           <a:prstGeom prst="rect">
             <a:avLst/>
@@ -6267,8 +6247,8 @@
         </p:nvSpPr>
         <p:spPr>
           <a:xfrm>
-            <a:off x="1183233" y="2121408"/>
-            <a:ext cx="10972" cy="576072"/>
+            <a:off x="1183233" y="2066543"/>
+            <a:ext cx="10972" cy="539496"/>
           </a:xfrm>
           <a:prstGeom prst="rect">
             <a:avLst/>
@@ -6318,8 +6298,8 @@
         </p:nvSpPr>
         <p:spPr>
           <a:xfrm>
-            <a:off x="2100232" y="1554480"/>
-            <a:ext cx="1645920" cy="548640"/>
+            <a:off x="1971752" y="1517904"/>
+            <a:ext cx="1645920" cy="530352"/>
           </a:xfrm>
           <a:prstGeom prst="rect">
             <a:avLst/>
@@ -6370,8 +6350,8 @@
         </p:nvSpPr>
         <p:spPr>
           <a:xfrm>
-            <a:off x="2917706" y="2121408"/>
-            <a:ext cx="10972" cy="576072"/>
+            <a:off x="2789226" y="2066543"/>
+            <a:ext cx="10972" cy="539496"/>
           </a:xfrm>
           <a:prstGeom prst="rect">
             <a:avLst/>
@@ -6421,8 +6401,8 @@
         </p:nvSpPr>
         <p:spPr>
           <a:xfrm>
-            <a:off x="10058400" y="1554480"/>
-            <a:ext cx="1645920" cy="548640"/>
+            <a:off x="10058400" y="1517904"/>
+            <a:ext cx="1645920" cy="530352"/>
           </a:xfrm>
           <a:prstGeom prst="rect">
             <a:avLst/>
@@ -6450,7 +6430,7 @@
                 </a:solidFill>
                 <a:latin typeface="Times New Roman"/>
               </a:rPr>
-              <a:t>0.8317</a:t>
+              <a:t>0.8355</a:t>
             </a:r>
             <a:br/>
             <a:r>
@@ -6473,8 +6453,8 @@
         </p:nvSpPr>
         <p:spPr>
           <a:xfrm>
-            <a:off x="10875873" y="2121408"/>
-            <a:ext cx="10972" cy="576072"/>
+            <a:off x="10875873" y="2066543"/>
+            <a:ext cx="10972" cy="539496"/>
           </a:xfrm>
           <a:prstGeom prst="rect">
             <a:avLst/>
@@ -6524,7 +6504,7 @@
         </p:nvSpPr>
         <p:spPr>
           <a:xfrm>
-            <a:off x="594360" y="3931920"/>
+            <a:off x="594360" y="3566160"/>
             <a:ext cx="11064240" cy="310896"/>
           </a:xfrm>
           <a:prstGeom prst="rect">
@@ -6539,7 +6519,7 @@
           <a:lstStyle/>
           <a:p>
             <a:pPr algn="l">
-              <a:defRPr sz="1300" b="1">
+              <a:defRPr sz="1250" b="1">
                 <a:solidFill>
                   <a:srgbClr val="1F4E79"/>
                 </a:solidFill>
@@ -6547,27 +6527,665 @@
               </a:defRPr>
             </a:pPr>
             <a:r>
-              <a:rPr sz="1300" b="1">
+              <a:rPr sz="1250" b="1">
                 <a:solidFill>
                   <a:srgbClr val="1F4E79"/>
                 </a:solidFill>
                 <a:latin typeface="Times New Roman"/>
               </a:rPr>
-              <a:t>Only 18 percent of the remaining gap is the cutoff. 82 percent needs a better model.</a:t>
+              <a:t>The split does not depend on which target-trained model is used as the endpoint</a:t>
             </a:r>
           </a:p>
         </p:txBody>
       </p:sp>
+      <p:graphicFrame>
+        <p:nvGraphicFramePr>
+          <p:cNvPr id="15" name="Table 14"/>
+          <p:cNvGraphicFramePr>
+            <a:graphicFrameLocks noGrp="1"/>
+          </p:cNvGraphicFramePr>
+          <p:nvPr/>
+        </p:nvGraphicFramePr>
+        <p:xfrm>
+          <a:off x="594360" y="3877056"/>
+          <a:ext cx="11064236" cy="1234440"/>
+        </p:xfrm>
+        <a:graphic>
+          <a:graphicData uri="http://schemas.openxmlformats.org/drawingml/2006/table">
+            <a:tbl>
+              <a:tblPr firstRow="1" bandRow="1">
+                <a:tableStyleId>{5C22544A-7EE6-4342-B048-85BDC9FD1C3A}</a:tableStyleId>
+              </a:tblPr>
+              <a:tblGrid>
+                <a:gridCol w="5669279"/>
+                <a:gridCol w="1463039"/>
+                <a:gridCol w="1828799"/>
+                <a:gridCol w="2103119"/>
+              </a:tblGrid>
+              <a:tr h="246888">
+                <a:tc>
+                  <a:txBody>
+                    <a:bodyPr/>
+                    <a:lstStyle/>
+                    <a:p>
+                      <a:pPr algn="l">
+                        <a:defRPr sz="1000" b="1">
+                          <a:solidFill>
+                            <a:srgbClr val="FFFFFF"/>
+                          </a:solidFill>
+                          <a:latin typeface="Times New Roman"/>
+                        </a:defRPr>
+                      </a:pPr>
+                      <a:r>
+                        <a:rPr sz="1000" b="1">
+                          <a:solidFill>
+                            <a:srgbClr val="FFFFFF"/>
+                          </a:solidFill>
+                          <a:latin typeface="Times New Roman"/>
+                        </a:rPr>
+                        <a:t>Endpoint (model trained with mBRSET labels)</a:t>
+                      </a:r>
+                    </a:p>
+                  </a:txBody>
+                  <a:tcPr marL="73152" marR="73152" marT="27432" marB="27432" anchor="ctr">
+                    <a:solidFill>
+                      <a:srgbClr val="1F4E79"/>
+                    </a:solidFill>
+                  </a:tcPr>
+                </a:tc>
+                <a:tc>
+                  <a:txBody>
+                    <a:bodyPr/>
+                    <a:lstStyle/>
+                    <a:p>
+                      <a:pPr algn="ctr">
+                        <a:defRPr sz="1000" b="1">
+                          <a:solidFill>
+                            <a:srgbClr val="FFFFFF"/>
+                          </a:solidFill>
+                          <a:latin typeface="Times New Roman"/>
+                        </a:defRPr>
+                      </a:pPr>
+                      <a:r>
+                        <a:rPr sz="1000" b="1">
+                          <a:solidFill>
+                            <a:srgbClr val="FFFFFF"/>
+                          </a:solidFill>
+                          <a:latin typeface="Times New Roman"/>
+                        </a:rPr>
+                        <a:t>F1</a:t>
+                      </a:r>
+                    </a:p>
+                  </a:txBody>
+                  <a:tcPr marL="73152" marR="73152" marT="27432" marB="27432" anchor="ctr">
+                    <a:solidFill>
+                      <a:srgbClr val="1F4E79"/>
+                    </a:solidFill>
+                  </a:tcPr>
+                </a:tc>
+                <a:tc>
+                  <a:txBody>
+                    <a:bodyPr/>
+                    <a:lstStyle/>
+                    <a:p>
+                      <a:pPr algn="ctr">
+                        <a:defRPr sz="1000" b="1">
+                          <a:solidFill>
+                            <a:srgbClr val="FFFFFF"/>
+                          </a:solidFill>
+                          <a:latin typeface="Times New Roman"/>
+                        </a:defRPr>
+                      </a:pPr>
+                      <a:r>
+                        <a:rPr sz="1000" b="1">
+                          <a:solidFill>
+                            <a:srgbClr val="FFFFFF"/>
+                          </a:solidFill>
+                          <a:latin typeface="Times New Roman"/>
+                        </a:rPr>
+                        <a:t>Cutoff</a:t>
+                      </a:r>
+                    </a:p>
+                  </a:txBody>
+                  <a:tcPr marL="73152" marR="73152" marT="27432" marB="27432" anchor="ctr">
+                    <a:solidFill>
+                      <a:srgbClr val="1F4E79"/>
+                    </a:solidFill>
+                  </a:tcPr>
+                </a:tc>
+                <a:tc>
+                  <a:txBody>
+                    <a:bodyPr/>
+                    <a:lstStyle/>
+                    <a:p>
+                      <a:pPr algn="ctr">
+                        <a:defRPr sz="1000" b="1">
+                          <a:solidFill>
+                            <a:srgbClr val="FFFFFF"/>
+                          </a:solidFill>
+                          <a:latin typeface="Times New Roman"/>
+                        </a:defRPr>
+                      </a:pPr>
+                      <a:r>
+                        <a:rPr sz="1000" b="1">
+                          <a:solidFill>
+                            <a:srgbClr val="FFFFFF"/>
+                          </a:solidFill>
+                          <a:latin typeface="Times New Roman"/>
+                        </a:rPr>
+                        <a:t>Representation</a:t>
+                      </a:r>
+                    </a:p>
+                  </a:txBody>
+                  <a:tcPr marL="73152" marR="73152" marT="27432" marB="27432" anchor="ctr">
+                    <a:solidFill>
+                      <a:srgbClr val="1F4E79"/>
+                    </a:solidFill>
+                  </a:tcPr>
+                </a:tc>
+              </a:tr>
+              <a:tr h="246888">
+                <a:tc>
+                  <a:txBody>
+                    <a:bodyPr/>
+                    <a:lstStyle/>
+                    <a:p>
+                      <a:pPr algn="l">
+                        <a:defRPr sz="1000" b="0">
+                          <a:solidFill>
+                            <a:srgbClr val="1A1A1A"/>
+                          </a:solidFill>
+                          <a:latin typeface="Times New Roman"/>
+                        </a:defRPr>
+                      </a:pPr>
+                      <a:r>
+                        <a:rPr sz="1000" b="0">
+                          <a:solidFill>
+                            <a:srgbClr val="1A1A1A"/>
+                          </a:solidFill>
+                          <a:latin typeface="Times New Roman"/>
+                        </a:rPr>
+                        <a:t>mBRSET from scratch, old recipe</a:t>
+                      </a:r>
+                    </a:p>
+                  </a:txBody>
+                  <a:tcPr marL="73152" marR="73152" marT="27432" marB="27432" anchor="ctr">
+                    <a:solidFill>
+                      <a:srgbClr val="FFFFFF"/>
+                    </a:solidFill>
+                  </a:tcPr>
+                </a:tc>
+                <a:tc>
+                  <a:txBody>
+                    <a:bodyPr/>
+                    <a:lstStyle/>
+                    <a:p>
+                      <a:pPr algn="ctr">
+                        <a:defRPr sz="1000" b="0">
+                          <a:solidFill>
+                            <a:srgbClr val="1A1A1A"/>
+                          </a:solidFill>
+                          <a:latin typeface="Times New Roman"/>
+                        </a:defRPr>
+                      </a:pPr>
+                      <a:r>
+                        <a:rPr sz="1000" b="0">
+                          <a:solidFill>
+                            <a:srgbClr val="1A1A1A"/>
+                          </a:solidFill>
+                          <a:latin typeface="Times New Roman"/>
+                        </a:rPr>
+                        <a:t>0.8146</a:t>
+                      </a:r>
+                    </a:p>
+                  </a:txBody>
+                  <a:tcPr marL="73152" marR="73152" marT="27432" marB="27432" anchor="ctr">
+                    <a:solidFill>
+                      <a:srgbClr val="FFFFFF"/>
+                    </a:solidFill>
+                  </a:tcPr>
+                </a:tc>
+                <a:tc>
+                  <a:txBody>
+                    <a:bodyPr/>
+                    <a:lstStyle/>
+                    <a:p>
+                      <a:pPr algn="ctr">
+                        <a:defRPr sz="1000" b="0">
+                          <a:solidFill>
+                            <a:srgbClr val="1A1A1A"/>
+                          </a:solidFill>
+                          <a:latin typeface="Times New Roman"/>
+                        </a:defRPr>
+                      </a:pPr>
+                      <a:r>
+                        <a:rPr sz="1000" b="0">
+                          <a:solidFill>
+                            <a:srgbClr val="1A1A1A"/>
+                          </a:solidFill>
+                          <a:latin typeface="Times New Roman"/>
+                        </a:rPr>
+                        <a:t>28%</a:t>
+                      </a:r>
+                    </a:p>
+                  </a:txBody>
+                  <a:tcPr marL="73152" marR="73152" marT="27432" marB="27432" anchor="ctr">
+                    <a:solidFill>
+                      <a:srgbClr val="FFFFFF"/>
+                    </a:solidFill>
+                  </a:tcPr>
+                </a:tc>
+                <a:tc>
+                  <a:txBody>
+                    <a:bodyPr/>
+                    <a:lstStyle/>
+                    <a:p>
+                      <a:pPr algn="ctr">
+                        <a:defRPr sz="1000" b="0">
+                          <a:solidFill>
+                            <a:srgbClr val="1A1A1A"/>
+                          </a:solidFill>
+                          <a:latin typeface="Times New Roman"/>
+                        </a:defRPr>
+                      </a:pPr>
+                      <a:r>
+                        <a:rPr sz="1000" b="0">
+                          <a:solidFill>
+                            <a:srgbClr val="1A1A1A"/>
+                          </a:solidFill>
+                          <a:latin typeface="Times New Roman"/>
+                        </a:rPr>
+                        <a:t>72%</a:t>
+                      </a:r>
+                    </a:p>
+                  </a:txBody>
+                  <a:tcPr marL="73152" marR="73152" marT="27432" marB="27432" anchor="ctr">
+                    <a:solidFill>
+                      <a:srgbClr val="FFFFFF"/>
+                    </a:solidFill>
+                  </a:tcPr>
+                </a:tc>
+              </a:tr>
+              <a:tr h="246888">
+                <a:tc>
+                  <a:txBody>
+                    <a:bodyPr/>
+                    <a:lstStyle/>
+                    <a:p>
+                      <a:pPr algn="l">
+                        <a:defRPr sz="1000" b="0">
+                          <a:solidFill>
+                            <a:srgbClr val="1A1A1A"/>
+                          </a:solidFill>
+                          <a:latin typeface="Times New Roman"/>
+                        </a:defRPr>
+                      </a:pPr>
+                      <a:r>
+                        <a:rPr sz="1000" b="0">
+                          <a:solidFill>
+                            <a:srgbClr val="1A1A1A"/>
+                          </a:solidFill>
+                          <a:latin typeface="Times New Roman"/>
+                        </a:rPr>
+                        <a:t>mBRSET from scratch, stable schedule</a:t>
+                      </a:r>
+                    </a:p>
+                  </a:txBody>
+                  <a:tcPr marL="73152" marR="73152" marT="27432" marB="27432" anchor="ctr">
+                    <a:solidFill>
+                      <a:srgbClr val="F2F4F7"/>
+                    </a:solidFill>
+                  </a:tcPr>
+                </a:tc>
+                <a:tc>
+                  <a:txBody>
+                    <a:bodyPr/>
+                    <a:lstStyle/>
+                    <a:p>
+                      <a:pPr algn="ctr">
+                        <a:defRPr sz="1000" b="0">
+                          <a:solidFill>
+                            <a:srgbClr val="1A1A1A"/>
+                          </a:solidFill>
+                          <a:latin typeface="Times New Roman"/>
+                        </a:defRPr>
+                      </a:pPr>
+                      <a:r>
+                        <a:rPr sz="1000" b="0">
+                          <a:solidFill>
+                            <a:srgbClr val="1A1A1A"/>
+                          </a:solidFill>
+                          <a:latin typeface="Times New Roman"/>
+                        </a:rPr>
+                        <a:t>0.8239</a:t>
+                      </a:r>
+                    </a:p>
+                  </a:txBody>
+                  <a:tcPr marL="73152" marR="73152" marT="27432" marB="27432" anchor="ctr">
+                    <a:solidFill>
+                      <a:srgbClr val="F2F4F7"/>
+                    </a:solidFill>
+                  </a:tcPr>
+                </a:tc>
+                <a:tc>
+                  <a:txBody>
+                    <a:bodyPr/>
+                    <a:lstStyle/>
+                    <a:p>
+                      <a:pPr algn="ctr">
+                        <a:defRPr sz="1000" b="0">
+                          <a:solidFill>
+                            <a:srgbClr val="1A1A1A"/>
+                          </a:solidFill>
+                          <a:latin typeface="Times New Roman"/>
+                        </a:defRPr>
+                      </a:pPr>
+                      <a:r>
+                        <a:rPr sz="1000" b="0">
+                          <a:solidFill>
+                            <a:srgbClr val="1A1A1A"/>
+                          </a:solidFill>
+                          <a:latin typeface="Times New Roman"/>
+                        </a:rPr>
+                        <a:t>22%</a:t>
+                      </a:r>
+                    </a:p>
+                  </a:txBody>
+                  <a:tcPr marL="73152" marR="73152" marT="27432" marB="27432" anchor="ctr">
+                    <a:solidFill>
+                      <a:srgbClr val="F2F4F7"/>
+                    </a:solidFill>
+                  </a:tcPr>
+                </a:tc>
+                <a:tc>
+                  <a:txBody>
+                    <a:bodyPr/>
+                    <a:lstStyle/>
+                    <a:p>
+                      <a:pPr algn="ctr">
+                        <a:defRPr sz="1000" b="0">
+                          <a:solidFill>
+                            <a:srgbClr val="1A1A1A"/>
+                          </a:solidFill>
+                          <a:latin typeface="Times New Roman"/>
+                        </a:defRPr>
+                      </a:pPr>
+                      <a:r>
+                        <a:rPr sz="1000" b="0">
+                          <a:solidFill>
+                            <a:srgbClr val="1A1A1A"/>
+                          </a:solidFill>
+                          <a:latin typeface="Times New Roman"/>
+                        </a:rPr>
+                        <a:t>78%</a:t>
+                      </a:r>
+                    </a:p>
+                  </a:txBody>
+                  <a:tcPr marL="73152" marR="73152" marT="27432" marB="27432" anchor="ctr">
+                    <a:solidFill>
+                      <a:srgbClr val="F2F4F7"/>
+                    </a:solidFill>
+                  </a:tcPr>
+                </a:tc>
+              </a:tr>
+              <a:tr h="246888">
+                <a:tc>
+                  <a:txBody>
+                    <a:bodyPr/>
+                    <a:lstStyle/>
+                    <a:p>
+                      <a:pPr algn="l">
+                        <a:defRPr sz="1000" b="0">
+                          <a:solidFill>
+                            <a:srgbClr val="1A1A1A"/>
+                          </a:solidFill>
+                          <a:latin typeface="Times New Roman"/>
+                        </a:defRPr>
+                      </a:pPr>
+                      <a:r>
+                        <a:rPr sz="1000" b="0">
+                          <a:solidFill>
+                            <a:srgbClr val="1A1A1A"/>
+                          </a:solidFill>
+                          <a:latin typeface="Times New Roman"/>
+                        </a:rPr>
+                        <a:t>BRSET and mBRSET trained jointly</a:t>
+                      </a:r>
+                    </a:p>
+                  </a:txBody>
+                  <a:tcPr marL="73152" marR="73152" marT="27432" marB="27432" anchor="ctr">
+                    <a:solidFill>
+                      <a:srgbClr val="FFFFFF"/>
+                    </a:solidFill>
+                  </a:tcPr>
+                </a:tc>
+                <a:tc>
+                  <a:txBody>
+                    <a:bodyPr/>
+                    <a:lstStyle/>
+                    <a:p>
+                      <a:pPr algn="ctr">
+                        <a:defRPr sz="1000" b="0">
+                          <a:solidFill>
+                            <a:srgbClr val="1A1A1A"/>
+                          </a:solidFill>
+                          <a:latin typeface="Times New Roman"/>
+                        </a:defRPr>
+                      </a:pPr>
+                      <a:r>
+                        <a:rPr sz="1000" b="0">
+                          <a:solidFill>
+                            <a:srgbClr val="1A1A1A"/>
+                          </a:solidFill>
+                          <a:latin typeface="Times New Roman"/>
+                        </a:rPr>
+                        <a:t>0.8250</a:t>
+                      </a:r>
+                    </a:p>
+                  </a:txBody>
+                  <a:tcPr marL="73152" marR="73152" marT="27432" marB="27432" anchor="ctr">
+                    <a:solidFill>
+                      <a:srgbClr val="FFFFFF"/>
+                    </a:solidFill>
+                  </a:tcPr>
+                </a:tc>
+                <a:tc>
+                  <a:txBody>
+                    <a:bodyPr/>
+                    <a:lstStyle/>
+                    <a:p>
+                      <a:pPr algn="ctr">
+                        <a:defRPr sz="1000" b="0">
+                          <a:solidFill>
+                            <a:srgbClr val="1A1A1A"/>
+                          </a:solidFill>
+                          <a:latin typeface="Times New Roman"/>
+                        </a:defRPr>
+                      </a:pPr>
+                      <a:r>
+                        <a:rPr sz="1000" b="0">
+                          <a:solidFill>
+                            <a:srgbClr val="1A1A1A"/>
+                          </a:solidFill>
+                          <a:latin typeface="Times New Roman"/>
+                        </a:rPr>
+                        <a:t>21%</a:t>
+                      </a:r>
+                    </a:p>
+                  </a:txBody>
+                  <a:tcPr marL="73152" marR="73152" marT="27432" marB="27432" anchor="ctr">
+                    <a:solidFill>
+                      <a:srgbClr val="FFFFFF"/>
+                    </a:solidFill>
+                  </a:tcPr>
+                </a:tc>
+                <a:tc>
+                  <a:txBody>
+                    <a:bodyPr/>
+                    <a:lstStyle/>
+                    <a:p>
+                      <a:pPr algn="ctr">
+                        <a:defRPr sz="1000" b="0">
+                          <a:solidFill>
+                            <a:srgbClr val="1A1A1A"/>
+                          </a:solidFill>
+                          <a:latin typeface="Times New Roman"/>
+                        </a:defRPr>
+                      </a:pPr>
+                      <a:r>
+                        <a:rPr sz="1000" b="0">
+                          <a:solidFill>
+                            <a:srgbClr val="1A1A1A"/>
+                          </a:solidFill>
+                          <a:latin typeface="Times New Roman"/>
+                        </a:rPr>
+                        <a:t>79%</a:t>
+                      </a:r>
+                    </a:p>
+                  </a:txBody>
+                  <a:tcPr marL="73152" marR="73152" marT="27432" marB="27432" anchor="ctr">
+                    <a:solidFill>
+                      <a:srgbClr val="FFFFFF"/>
+                    </a:solidFill>
+                  </a:tcPr>
+                </a:tc>
+              </a:tr>
+              <a:tr h="246888">
+                <a:tc>
+                  <a:txBody>
+                    <a:bodyPr/>
+                    <a:lstStyle/>
+                    <a:p>
+                      <a:pPr algn="l">
+                        <a:defRPr sz="1000" b="0">
+                          <a:solidFill>
+                            <a:srgbClr val="1A1A1A"/>
+                          </a:solidFill>
+                          <a:latin typeface="Times New Roman"/>
+                        </a:defRPr>
+                      </a:pPr>
+                      <a:r>
+                        <a:rPr sz="1000" b="0">
+                          <a:solidFill>
+                            <a:srgbClr val="1A1A1A"/>
+                          </a:solidFill>
+                          <a:latin typeface="Times New Roman"/>
+                        </a:rPr>
+                        <a:t>BRSET pretrain, mBRSET finetune (best)</a:t>
+                      </a:r>
+                    </a:p>
+                  </a:txBody>
+                  <a:tcPr marL="73152" marR="73152" marT="27432" marB="27432" anchor="ctr">
+                    <a:solidFill>
+                      <a:srgbClr val="F2F4F7"/>
+                    </a:solidFill>
+                  </a:tcPr>
+                </a:tc>
+                <a:tc>
+                  <a:txBody>
+                    <a:bodyPr/>
+                    <a:lstStyle/>
+                    <a:p>
+                      <a:pPr algn="ctr">
+                        <a:defRPr sz="1000" b="0">
+                          <a:solidFill>
+                            <a:srgbClr val="1A1A1A"/>
+                          </a:solidFill>
+                          <a:latin typeface="Times New Roman"/>
+                        </a:defRPr>
+                      </a:pPr>
+                      <a:r>
+                        <a:rPr sz="1000" b="0">
+                          <a:solidFill>
+                            <a:srgbClr val="1A1A1A"/>
+                          </a:solidFill>
+                          <a:latin typeface="Times New Roman"/>
+                        </a:rPr>
+                        <a:t>0.8355</a:t>
+                      </a:r>
+                    </a:p>
+                  </a:txBody>
+                  <a:tcPr marL="73152" marR="73152" marT="27432" marB="27432" anchor="ctr">
+                    <a:solidFill>
+                      <a:srgbClr val="F2F4F7"/>
+                    </a:solidFill>
+                  </a:tcPr>
+                </a:tc>
+                <a:tc>
+                  <a:txBody>
+                    <a:bodyPr/>
+                    <a:lstStyle/>
+                    <a:p>
+                      <a:pPr algn="ctr">
+                        <a:defRPr sz="1000" b="0">
+                          <a:solidFill>
+                            <a:srgbClr val="1A1A1A"/>
+                          </a:solidFill>
+                          <a:latin typeface="Times New Roman"/>
+                        </a:defRPr>
+                      </a:pPr>
+                      <a:r>
+                        <a:rPr sz="1000" b="0">
+                          <a:solidFill>
+                            <a:srgbClr val="1A1A1A"/>
+                          </a:solidFill>
+                          <a:latin typeface="Times New Roman"/>
+                        </a:rPr>
+                        <a:t>17%</a:t>
+                      </a:r>
+                    </a:p>
+                  </a:txBody>
+                  <a:tcPr marL="73152" marR="73152" marT="27432" marB="27432" anchor="ctr">
+                    <a:solidFill>
+                      <a:srgbClr val="F2F4F7"/>
+                    </a:solidFill>
+                  </a:tcPr>
+                </a:tc>
+                <a:tc>
+                  <a:txBody>
+                    <a:bodyPr/>
+                    <a:lstStyle/>
+                    <a:p>
+                      <a:pPr algn="ctr">
+                        <a:defRPr sz="1000" b="0">
+                          <a:solidFill>
+                            <a:srgbClr val="1A1A1A"/>
+                          </a:solidFill>
+                          <a:latin typeface="Times New Roman"/>
+                        </a:defRPr>
+                      </a:pPr>
+                      <a:r>
+                        <a:rPr sz="1000" b="0">
+                          <a:solidFill>
+                            <a:srgbClr val="1A1A1A"/>
+                          </a:solidFill>
+                          <a:latin typeface="Times New Roman"/>
+                        </a:rPr>
+                        <a:t>83%</a:t>
+                      </a:r>
+                    </a:p>
+                  </a:txBody>
+                  <a:tcPr marL="73152" marR="73152" marT="27432" marB="27432" anchor="ctr">
+                    <a:solidFill>
+                      <a:srgbClr val="F2F4F7"/>
+                    </a:solidFill>
+                  </a:tcPr>
+                </a:tc>
+              </a:tr>
+            </a:tbl>
+          </a:graphicData>
+        </a:graphic>
+      </p:graphicFrame>
       <p:sp>
         <p:nvSpPr>
-          <p:cNvPr id="15" name="TextBox 14"/>
+          <p:cNvPr id="16" name="TextBox 15"/>
           <p:cNvSpPr txBox="1"/>
           <p:nvPr/>
         </p:nvSpPr>
         <p:spPr>
           <a:xfrm>
-            <a:off x="594360" y="4261104"/>
-            <a:ext cx="11064240" cy="1636776"/>
+            <a:off x="594360" y="5212080"/>
+            <a:ext cx="11064240" cy="841247"/>
           </a:xfrm>
           <a:prstGeom prst="rect">
             <a:avLst/>
@@ -6584,7 +7202,7 @@
               <a:spcAft>
                 <a:spcPts val="800"/>
               </a:spcAft>
-              <a:defRPr sz="1200" b="0">
+              <a:defRPr sz="1150" b="0">
                 <a:solidFill>
                   <a:srgbClr val="1A1A1A"/>
                 </a:solidFill>
@@ -6592,13 +7210,13 @@
               </a:defRPr>
             </a:pPr>
             <a:r>
-              <a:rPr sz="1200" b="0">
+              <a:rPr sz="1150" b="0">
                 <a:solidFill>
                   <a:srgbClr val="1A1A1A"/>
                 </a:solidFill>
                 <a:latin typeface="Times New Roman"/>
               </a:rPr>
-              <a:t>The 0.7927 ceiling was found by sweeping every cutoff from 0.005 to 0.995. Calibration, temperature scaling and label-shift correction only rescale scores, so all of them land on this same curve and none can pass it. That family is exhausted.</a:t>
+              <a:t>Across six target-trained models the cutoff never accounts for more than 28 percent. At least 72 percent is the representation, whichever endpoint is chosen.</a:t>
             </a:r>
           </a:p>
           <a:p>
@@ -6606,7 +7224,7 @@
               <a:spcAft>
                 <a:spcPts val="800"/>
               </a:spcAft>
-              <a:defRPr sz="1200" b="0">
+              <a:defRPr sz="1150" b="0">
                 <a:solidFill>
                   <a:srgbClr val="1A1A1A"/>
                 </a:solidFill>
@@ -6614,13 +7232,13 @@
               </a:defRPr>
             </a:pPr>
             <a:r>
-              <a:rPr sz="1200" b="0">
+              <a:rPr sz="1150" b="0">
                 <a:solidFill>
                   <a:srgbClr val="1A1A1A"/>
                 </a:solidFill>
                 <a:latin typeface="Times New Roman"/>
               </a:rPr>
-              <a:t>The shift is not only that patients are sicker. AUC is mathematically unaffected by how many patients are diseased (Fawcett 2006), so if prevalence alone had changed, AUC would have held. It fell from 0.9906 to 0.9060, which means the images themselves are different.</a:t>
+              <a:t>The 0.7927 ceiling was found by sweeping every cutoff from 0.005 to 0.995. Calibration, temperature scaling and label-shift correction only rescale scores, so none can pass it. That family is exhausted.</a:t>
             </a:r>
           </a:p>
           <a:p>
@@ -6628,7 +7246,7 @@
               <a:spcAft>
                 <a:spcPts val="800"/>
               </a:spcAft>
-              <a:defRPr sz="1200" b="0">
+              <a:defRPr sz="1150" b="0">
                 <a:solidFill>
                   <a:srgbClr val="1A1A1A"/>
                 </a:solidFill>
@@ -6636,26 +7254,26 @@
               </a:defRPr>
             </a:pPr>
             <a:r>
-              <a:rPr sz="1200" b="0">
+              <a:rPr sz="1150" b="0">
                 <a:solidFill>
                   <a:srgbClr val="1A1A1A"/>
                 </a:solidFill>
                 <a:latin typeface="Times New Roman"/>
               </a:rPr>
-              <a:t>0.8317 is what fine-tuning on labelled mBRSET achieves, so it is the value of target labels, not a hard limit. The research question is how close a method with no target labels can get to it.</a:t>
+              <a:t>Even the best model trained on labelled mBRSET still misses 27 of 159 diseased patients, so target labels alone do not solve this.</a:t>
             </a:r>
           </a:p>
         </p:txBody>
       </p:sp>
       <p:sp>
         <p:nvSpPr>
-          <p:cNvPr id="16" name="TextBox 15"/>
+          <p:cNvPr id="17" name="TextBox 16"/>
           <p:cNvSpPr txBox="1"/>
           <p:nvPr/>
         </p:nvSpPr>
         <p:spPr>
           <a:xfrm>
-            <a:off x="594360" y="5961888"/>
+            <a:off x="594360" y="6089904"/>
             <a:ext cx="11064240" cy="640080"/>
           </a:xfrm>
           <a:prstGeom prst="rect">
@@ -6684,7 +7302,7 @@
                 </a:solidFill>
                 <a:latin typeface="Times New Roman"/>
               </a:rPr>
-              <a:t>The cutoff route is nearly exhausted. The remaining work is representation, which is where the literature points.</a:t>
+              <a:t>The cutoff route is exhausted. The remaining work is representation.</a:t>
             </a:r>
           </a:p>
         </p:txBody>
@@ -8510,7 +9128,7 @@
                 <a:gridCol w="6659033"/>
                 <a:gridCol w="922020"/>
               </a:tblGrid>
-              <a:tr h="377190">
+              <a:tr h="335280">
                 <a:tc>
                   <a:txBody>
                     <a:bodyPr/>
@@ -8623,7 +9241,7 @@
                   </a:tcPr>
                 </a:tc>
               </a:tr>
-              <a:tr h="377190">
+              <a:tr h="335280">
                 <a:tc>
                   <a:txBody>
                     <a:bodyPr/>
@@ -8745,7 +9363,7 @@
                   </a:tcPr>
                 </a:tc>
               </a:tr>
-              <a:tr h="377190">
+              <a:tr h="335280">
                 <a:tc>
                   <a:txBody>
                     <a:bodyPr/>
@@ -8867,7 +9485,7 @@
                   </a:tcPr>
                 </a:tc>
               </a:tr>
-              <a:tr h="377190">
+              <a:tr h="335280">
                 <a:tc>
                   <a:txBody>
                     <a:bodyPr/>
@@ -8989,7 +9607,7 @@
                   </a:tcPr>
                 </a:tc>
               </a:tr>
-              <a:tr h="377190">
+              <a:tr h="335280">
                 <a:tc>
                   <a:txBody>
                     <a:bodyPr/>
@@ -9111,7 +9729,7 @@
                   </a:tcPr>
                 </a:tc>
               </a:tr>
-              <a:tr h="377190">
+              <a:tr h="335280">
                 <a:tc>
                   <a:txBody>
                     <a:bodyPr/>
@@ -9252,7 +9870,7 @@
                   </a:tcPr>
                 </a:tc>
               </a:tr>
-              <a:tr h="377190">
+              <a:tr h="335280">
                 <a:tc>
                   <a:txBody>
                     <a:bodyPr/>
@@ -9303,7 +9921,7 @@
                           </a:solidFill>
                           <a:latin typeface="Times New Roman"/>
                         </a:rPr>
-                        <a:t>Device-calibrated degradation augmentation</a:t>
+                        <a:t>Establish the target-trained endpoint</a:t>
                       </a:r>
                     </a:p>
                   </a:txBody>
@@ -9333,7 +9951,26 @@
                           </a:solidFill>
                           <a:latin typeface="Times New Roman"/>
                         </a:rPr>
-                        <a:t>Fit degradation parameters to measured mBRSET statistics, using no target labels</a:t>
+                        <a:t>Six configurations measured. Best is 0.8355 (BRSET pretrain, mBRSET finetune).</a:t>
+                      </a:r>
+                    </a:p>
+                    <a:p>
+                      <a:pPr algn="ctr">
+                        <a:defRPr sz="1000" b="0">
+                          <a:solidFill>
+                            <a:srgbClr val="1A1A1A"/>
+                          </a:solidFill>
+                          <a:latin typeface="Times New Roman"/>
+                        </a:defRPr>
+                      </a:pPr>
+                      <a:r>
+                        <a:rPr sz="1000" b="0">
+                          <a:solidFill>
+                            <a:srgbClr val="1A1A1A"/>
+                          </a:solidFill>
+                          <a:latin typeface="Times New Roman"/>
+                        </a:rPr>
+                        <a:t>Even with labels, 27 of 159 diseased patients are still missed</a:t>
                       </a:r>
                     </a:p>
                   </a:txBody>
@@ -9351,7 +9988,7 @@
                       <a:pPr algn="ctr">
                         <a:defRPr sz="1000" b="1">
                           <a:solidFill>
-                            <a:srgbClr val="A36E0A"/>
+                            <a:srgbClr val="1E6B3C"/>
                           </a:solidFill>
                           <a:latin typeface="Times New Roman"/>
                         </a:defRPr>
@@ -9359,11 +9996,11 @@
                       <a:r>
                         <a:rPr sz="1000" b="1">
                           <a:solidFill>
-                            <a:srgbClr val="A36E0A"/>
-                          </a:solidFill>
-                          <a:latin typeface="Times New Roman"/>
-                        </a:rPr>
-                        <a:t>Next</a:t>
+                            <a:srgbClr val="1E6B3C"/>
+                          </a:solidFill>
+                          <a:latin typeface="Times New Roman"/>
+                        </a:rPr>
+                        <a:t>Done</a:t>
                       </a:r>
                     </a:p>
                   </a:txBody>
@@ -9374,7 +10011,7 @@
                   </a:tcPr>
                 </a:tc>
               </a:tr>
-              <a:tr h="377190">
+              <a:tr h="335280">
                 <a:tc>
                   <a:txBody>
                     <a:bodyPr/>
@@ -9425,13 +10062,154 @@
                           </a:solidFill>
                           <a:latin typeface="Times New Roman"/>
                         </a:rPr>
+                        <a:t>Device-calibrated degradation augmentation</a:t>
+                      </a:r>
+                    </a:p>
+                  </a:txBody>
+                  <a:tcPr marL="73152" marR="73152" marT="27432" marB="27432" anchor="ctr">
+                    <a:solidFill>
+                      <a:srgbClr val="FFFFFF"/>
+                    </a:solidFill>
+                  </a:tcPr>
+                </a:tc>
+                <a:tc>
+                  <a:txBody>
+                    <a:bodyPr/>
+                    <a:lstStyle/>
+                    <a:p>
+                      <a:pPr algn="ctr">
+                        <a:defRPr sz="1000" b="0">
+                          <a:solidFill>
+                            <a:srgbClr val="1A1A1A"/>
+                          </a:solidFill>
+                          <a:latin typeface="Times New Roman"/>
+                        </a:defRPr>
+                      </a:pPr>
+                      <a:r>
+                        <a:rPr sz="1000" b="0">
+                          <a:solidFill>
+                            <a:srgbClr val="1A1A1A"/>
+                          </a:solidFill>
+                          <a:latin typeface="Times New Roman"/>
+                        </a:rPr>
+                        <a:t>Fit degradation to measured mBRSET statistics using cofe-Net's physical model,</a:t>
+                      </a:r>
+                    </a:p>
+                    <a:p>
+                      <a:pPr algn="ctr">
+                        <a:defRPr sz="1000" b="0">
+                          <a:solidFill>
+                            <a:srgbClr val="1A1A1A"/>
+                          </a:solidFill>
+                          <a:latin typeface="Times New Roman"/>
+                        </a:defRPr>
+                      </a:pPr>
+                      <a:r>
+                        <a:rPr sz="1000" b="0">
+                          <a:solidFill>
+                            <a:srgbClr val="1A1A1A"/>
+                          </a:solidFill>
+                          <a:latin typeface="Times New Roman"/>
+                        </a:rPr>
+                        <a:t>with no target labels. This is the novel contribution</a:t>
+                      </a:r>
+                    </a:p>
+                  </a:txBody>
+                  <a:tcPr marL="73152" marR="73152" marT="27432" marB="27432" anchor="ctr">
+                    <a:solidFill>
+                      <a:srgbClr val="FFFFFF"/>
+                    </a:solidFill>
+                  </a:tcPr>
+                </a:tc>
+                <a:tc>
+                  <a:txBody>
+                    <a:bodyPr/>
+                    <a:lstStyle/>
+                    <a:p>
+                      <a:pPr algn="ctr">
+                        <a:defRPr sz="1000" b="1">
+                          <a:solidFill>
+                            <a:srgbClr val="A36E0A"/>
+                          </a:solidFill>
+                          <a:latin typeface="Times New Roman"/>
+                        </a:defRPr>
+                      </a:pPr>
+                      <a:r>
+                        <a:rPr sz="1000" b="1">
+                          <a:solidFill>
+                            <a:srgbClr val="A36E0A"/>
+                          </a:solidFill>
+                          <a:latin typeface="Times New Roman"/>
+                        </a:rPr>
+                        <a:t>Next</a:t>
+                      </a:r>
+                    </a:p>
+                  </a:txBody>
+                  <a:tcPr marL="73152" marR="73152" marT="27432" marB="27432" anchor="ctr">
+                    <a:solidFill>
+                      <a:srgbClr val="FFFFFF"/>
+                    </a:solidFill>
+                  </a:tcPr>
+                </a:tc>
+              </a:tr>
+              <a:tr h="335280">
+                <a:tc>
+                  <a:txBody>
+                    <a:bodyPr/>
+                    <a:lstStyle/>
+                    <a:p>
+                      <a:pPr algn="l">
+                        <a:defRPr sz="1000" b="0">
+                          <a:solidFill>
+                            <a:srgbClr val="1A1A1A"/>
+                          </a:solidFill>
+                          <a:latin typeface="Times New Roman"/>
+                        </a:defRPr>
+                      </a:pPr>
+                      <a:r>
+                        <a:rPr sz="1000" b="0">
+                          <a:solidFill>
+                            <a:srgbClr val="1A1A1A"/>
+                          </a:solidFill>
+                          <a:latin typeface="Times New Roman"/>
+                        </a:rPr>
+                        <a:t>8</a:t>
+                      </a:r>
+                    </a:p>
+                  </a:txBody>
+                  <a:tcPr marL="73152" marR="73152" marT="27432" marB="27432" anchor="ctr">
+                    <a:solidFill>
+                      <a:srgbClr val="F2F4F7"/>
+                    </a:solidFill>
+                  </a:tcPr>
+                </a:tc>
+                <a:tc>
+                  <a:txBody>
+                    <a:bodyPr/>
+                    <a:lstStyle/>
+                    <a:p>
+                      <a:pPr algn="ctr">
+                        <a:defRPr sz="1000" b="0">
+                          <a:solidFill>
+                            <a:srgbClr val="1A1A1A"/>
+                          </a:solidFill>
+                          <a:latin typeface="Times New Roman"/>
+                        </a:defRPr>
+                      </a:pPr>
+                      <a:r>
+                        <a:rPr sz="1000" b="0">
+                          <a:solidFill>
+                            <a:srgbClr val="1A1A1A"/>
+                          </a:solidFill>
+                          <a:latin typeface="Times New Roman"/>
+                        </a:rPr>
                         <a:t>Control experiment</a:t>
                       </a:r>
                     </a:p>
                   </a:txBody>
                   <a:tcPr marL="73152" marR="73152" marT="27432" marB="27432" anchor="ctr">
                     <a:solidFill>
-                      <a:srgbClr val="FFFFFF"/>
+                      <a:srgbClr val="F2F4F7"/>
                     </a:solidFill>
                   </a:tcPr>
                 </a:tc>
@@ -9461,7 +10239,7 @@
                   </a:txBody>
                   <a:tcPr marL="73152" marR="73152" marT="27432" marB="27432" anchor="ctr">
                     <a:solidFill>
-                      <a:srgbClr val="FFFFFF"/>
+                      <a:srgbClr val="F2F4F7"/>
                     </a:solidFill>
                   </a:tcPr>
                 </a:tc>
@@ -9491,7 +10269,7 @@
                   </a:txBody>
                   <a:tcPr marL="73152" marR="73152" marT="27432" marB="27432" anchor="ctr">
                     <a:solidFill>
-                      <a:srgbClr val="FFFFFF"/>
+                      <a:srgbClr val="F2F4F7"/>
                     </a:solidFill>
                   </a:tcPr>
                 </a:tc>
@@ -9508,7 +10286,7 @@
         </p:nvSpPr>
         <p:spPr>
           <a:xfrm>
-            <a:off x="594360" y="4663440"/>
+            <a:off x="594360" y="4901184"/>
             <a:ext cx="11064240" cy="310896"/>
           </a:xfrm>
           <a:prstGeom prst="rect">
@@ -9537,7 +10315,7 @@
                 </a:solidFill>
                 <a:latin typeface="Times New Roman"/>
               </a:rPr>
-              <a:t>The idea behind step 6</a:t>
+              <a:t>The idea behind step 7, the novel contribution</a:t>
             </a:r>
           </a:p>
         </p:txBody>
@@ -9550,8 +10328,8 @@
         </p:nvSpPr>
         <p:spPr>
           <a:xfrm>
-            <a:off x="594360" y="4974336"/>
-            <a:ext cx="11064240" cy="969263"/>
+            <a:off x="594360" y="5212080"/>
+            <a:ext cx="11064240" cy="841247"/>
           </a:xfrm>
           <a:prstGeom prst="rect">
             <a:avLst/>
@@ -9568,7 +10346,7 @@
               <a:spcAft>
                 <a:spcPts val="800"/>
               </a:spcAft>
-              <a:defRPr sz="1200" b="0">
+              <a:defRPr sz="1150" b="0">
                 <a:solidFill>
                   <a:srgbClr val="1A1A1A"/>
                 </a:solidFill>
@@ -9576,7 +10354,7 @@
               </a:defRPr>
             </a:pPr>
             <a:r>
-              <a:rPr sz="1200" b="0">
+              <a:rPr sz="1150" b="0">
                 <a:solidFill>
                   <a:srgbClr val="1A1A1A"/>
                 </a:solidFill>
@@ -9590,7 +10368,7 @@
               <a:spcAft>
                 <a:spcPts val="800"/>
               </a:spcAft>
-              <a:defRPr sz="1200" b="0">
+              <a:defRPr sz="1150" b="0">
                 <a:solidFill>
                   <a:srgbClr val="1A1A1A"/>
                 </a:solidFill>
@@ -9598,7 +10376,7 @@
               </a:defRPr>
             </a:pPr>
             <a:r>
-              <a:rPr sz="1200" b="0">
+              <a:rPr sz="1150" b="0">
                 <a:solidFill>
                   <a:srgbClr val="1A1A1A"/>
                 </a:solidFill>
@@ -9617,7 +10395,7 @@
         </p:nvSpPr>
         <p:spPr>
           <a:xfrm>
-            <a:off x="594360" y="5989320"/>
+            <a:off x="594360" y="6089904"/>
             <a:ext cx="11064240" cy="640080"/>
           </a:xfrm>
           <a:prstGeom prst="rect">
@@ -9646,7 +10424,7 @@
                 </a:solidFill>
                 <a:latin typeface="Times New Roman"/>
               </a:rPr>
-              <a:t>Steps 1 to 5 are complete and measured. Step 6 is the novel contribution.</a:t>
+              <a:t>Steps 1 to 6 are measurement and diagnosis, and they are complete. Step 7 builds.</a:t>
             </a:r>
           </a:p>
         </p:txBody>
